--- a/liveries/nasa-dark/template.pptx
+++ b/liveries/nasa-dark/template.pptx
@@ -3355,5 +3355,31 @@
   </a:themeElements>
   <a:objectDefaults/>
   <a:extraClrSchemeLst/>
+  <a:custClrLst>
+    <a:custClr name="Data 1 · Blue">
+      <a:srgbClr val="256EE4"/>
+    </a:custClr>
+    <a:custClr name="Data 2 · Red">
+      <a:srgbClr val="EF483F"/>
+    </a:custClr>
+    <a:custClr name="Data 3 · Orange">
+      <a:srgbClr val="F29D49"/>
+    </a:custClr>
+    <a:custClr name="Data 4 · Slate">
+      <a:srgbClr val="487682"/>
+    </a:custClr>
+    <a:custClr name="Data 5 · Gold">
+      <a:srgbClr val="C2B47C"/>
+    </a:custClr>
+    <a:custClr name="Data 6 · Blue">
+      <a:srgbClr val="609AF6"/>
+    </a:custClr>
+    <a:custClr name="Data 7 · Red">
+      <a:srgbClr val="FA8C87"/>
+    </a:custClr>
+    <a:custClr name="Data 8 · Slate">
+      <a:srgbClr val="79A3AD"/>
+    </a:custClr>
+  </a:custClrLst>
 </a:theme>
 </file>
--- a/liveries/nasa-dark/template.pptx
+++ b/liveries/nasa-dark/template.pptx
@@ -2731,8 +2731,8 @@
         </p:nvSpPr>
         <p:spPr>
           <a:xfrm>
-            <a:off x="0" y="252032"/>
-            <a:ext cx="164592" cy="490690"/>
+            <a:off x="0" y="251517"/>
+            <a:ext cx="164592" cy="400164"/>
           </a:xfrm>
           <a:prstGeom prst="rect">
             <a:avLst/>
@@ -2780,8 +2780,8 @@
         </p:nvSpPr>
         <p:spPr>
           <a:xfrm>
-            <a:off x="548640" y="252032"/>
-            <a:ext cx="7349573" cy="490690"/>
+            <a:off x="548640" y="251517"/>
+            <a:ext cx="7349573" cy="400164"/>
           </a:xfrm>
           <a:prstGeom prst="rect">
             <a:avLst/>

--- a/liveries/nasa-dark/template.pptx
+++ b/liveries/nasa-dark/template.pptx
@@ -2759,11 +2759,9 @@
           <a:prstGeom prst="line">
             <a:avLst/>
           </a:prstGeom>
-          <a:ln w="9525">
+          <a:ln w="8230">
             <a:solidFill>
-              <a:schemeClr val="tx1">
-                <a:alpha val="30000"/>
-              </a:schemeClr>
+              <a:srgbClr val="606367"/>
             </a:solidFill>
           </a:ln>
         </p:spPr>

--- a/liveries/nasa-dark/template.pptx
+++ b/liveries/nasa-dark/template.pptx
@@ -139,7 +139,7 @@
                 <a:spcPts val="0"/>
               </a:spcBef>
               <a:buNone/>
-              <a:defRPr sz="1000" b="1" cap="all">
+              <a:defRPr sz="1000" b="1" cap="all" spc="80">
                 <a:solidFill>
                   <a:srgbClr val="FFFFFF"/>
                 </a:solidFill>
@@ -2469,7 +2469,7 @@
                 <a:spcPts val="0"/>
               </a:spcBef>
               <a:buNone/>
-              <a:defRPr sz="1000" b="1" cap="all">
+              <a:defRPr sz="1000" b="1" cap="all" spc="80">
                 <a:solidFill>
                   <a:srgbClr val="FFFFFF"/>
                 </a:solidFill>

--- a/liveries/nasa-dark/template.pptx
+++ b/liveries/nasa-dark/template.pptx
@@ -139,7 +139,7 @@
                 <a:spcPts val="0"/>
               </a:spcBef>
               <a:buNone/>
-              <a:defRPr sz="1000" b="1" cap="all">
+              <a:defRPr sz="1000" b="1" cap="all" spc="80">
                 <a:solidFill>
                   <a:srgbClr val="FFFFFF"/>
                 </a:solidFill>
@@ -2469,7 +2469,7 @@
                 <a:spcPts val="0"/>
               </a:spcBef>
               <a:buNone/>
-              <a:defRPr sz="1000" b="1" cap="all">
+              <a:defRPr sz="1000" b="1" cap="all" spc="80">
                 <a:solidFill>
                   <a:srgbClr val="FFFFFF"/>
                 </a:solidFill>
@@ -2731,8 +2731,8 @@
         </p:nvSpPr>
         <p:spPr>
           <a:xfrm>
-            <a:off x="0" y="252032"/>
-            <a:ext cx="164592" cy="490690"/>
+            <a:off x="0" y="251517"/>
+            <a:ext cx="164592" cy="400164"/>
           </a:xfrm>
           <a:prstGeom prst="rect">
             <a:avLst/>
@@ -2759,11 +2759,9 @@
           <a:prstGeom prst="line">
             <a:avLst/>
           </a:prstGeom>
-          <a:ln w="9525">
+          <a:ln w="8230">
             <a:solidFill>
-              <a:schemeClr val="tx1">
-                <a:alpha val="30000"/>
-              </a:schemeClr>
+              <a:srgbClr val="606367"/>
             </a:solidFill>
           </a:ln>
         </p:spPr>
@@ -2780,8 +2778,8 @@
         </p:nvSpPr>
         <p:spPr>
           <a:xfrm>
-            <a:off x="548640" y="252032"/>
-            <a:ext cx="7349573" cy="490690"/>
+            <a:off x="548640" y="251517"/>
+            <a:ext cx="7349573" cy="400164"/>
           </a:xfrm>
           <a:prstGeom prst="rect">
             <a:avLst/>
